--- a/заняття_1/Вступ до хмарних обчислень та AWS.pptx
+++ b/заняття_1/Вступ до хмарних обчислень та AWS.pptx
@@ -5946,7 +5946,7 @@
               <a:t>У</a:t>
             </a:r>
             <a:r>
-              <a:rPr lang="en-US" sz="1200" i="1" dirty="0" err="1">
+              <a:rPr lang="en-US" sz="1200" i="1" dirty="0">
                 <a:solidFill>
                   <a:srgbClr val="5A6674"/>
                 </a:solidFill>
@@ -5954,18 +5954,7 @@
                 <a:ea typeface="Calibri" pitchFamily="34" charset="-122"/>
                 <a:cs typeface="Calibri" pitchFamily="34" charset="-120"/>
               </a:rPr>
-              <a:t>сі</a:t>
-            </a:r>
-            <a:r>
-              <a:rPr lang="en-US" sz="1200" i="1" dirty="0">
-                <a:solidFill>
-                  <a:srgbClr val="5A6674"/>
-                </a:solidFill>
-                <a:latin typeface="Calibri" pitchFamily="34" charset="0"/>
-                <a:ea typeface="Calibri" pitchFamily="34" charset="-122"/>
-                <a:cs typeface="Calibri" pitchFamily="34" charset="-120"/>
-              </a:rPr>
-              <a:t> три платформи покривають подібний базовий набір сервісів — обчислення, сховище, мережу, бази даних. Вибір частіше залежить від наявної експертизи команди, вимог замовника та вже використовуваної екосистеми (наприклад, Azure — типовий вибір для компаній на стеку Microsoft).</a:t>
+              <a:t>сі три платформи покривають подібний базовий набір сервісів — обчислення, сховище, мережу, бази даних. Вибір частіше залежить від наявної експертизи команди, вимог замовника та вже використовуваної екосистеми (наприклад, Azure — типовий вибір для компаній на стеку Microsoft).</a:t>
             </a:r>
             <a:endParaRPr lang="en-US" sz="1200" dirty="0"/>
           </a:p>
